--- a/PIE_가이드_한국어.pptx
+++ b/PIE_가이드_한국어.pptx
@@ -28211,7 +28211,7 @@
         </p:nvGraphicFramePr>
         <p:xfrm>
           <a:off x="640080" y="1143000"/>
-          <a:ext cx="10881360" cy="1481328"/>
+          <a:ext cx="10881360" cy="1773936"/>
         </p:xfrm>
         <a:graphic>
           <a:graphicData uri="http://schemas.openxmlformats.org/drawingml/2006/table">
@@ -28224,7 +28224,7 @@
                 <a:gridCol w="3627120"/>
                 <a:gridCol w="3627120"/>
               </a:tblGrid>
-              <a:tr h="296265">
+              <a:tr h="295656">
                 <a:tc>
                   <a:txBody>
                     <a:bodyPr/>
@@ -28292,7 +28292,7 @@
                   </a:tcPr>
                 </a:tc>
               </a:tr>
-              <a:tr h="296265">
+              <a:tr h="295656">
                 <a:tc>
                   <a:txBody>
                     <a:bodyPr/>
@@ -28375,7 +28375,7 @@
                   </a:tcPr>
                 </a:tc>
               </a:tr>
-              <a:tr h="296265">
+              <a:tr h="295656">
                 <a:tc>
                   <a:txBody>
                     <a:bodyPr/>
@@ -28458,7 +28458,7 @@
                   </a:tcPr>
                 </a:tc>
               </a:tr>
-              <a:tr h="296265">
+              <a:tr h="295656">
                 <a:tc>
                   <a:txBody>
                     <a:bodyPr/>
@@ -28541,7 +28541,7 @@
                   </a:tcPr>
                 </a:tc>
               </a:tr>
-              <a:tr h="296268">
+              <a:tr h="295656">
                 <a:tc>
                   <a:txBody>
                     <a:bodyPr/>
@@ -28613,7 +28613,7 @@
                           </a:solidFill>
                           <a:latin typeface="맑은 고딕"/>
                         </a:rPr>
-                        <a:t>여러 PC가 같은 표준시간을 함께 쌓을 때</a:t>
+                        <a:t>같은 공장 안에서 함께 쌓을 때</a:t>
                       </a:r>
                     </a:p>
                   </a:txBody>
@@ -28624,6 +28624,98 @@
                   </a:tcPr>
                 </a:tc>
               </a:tr>
+              <a:tr h="295656">
+                <a:tc>
+                  <a:txBody>
+                    <a:bodyPr/>
+                    <a:lstStyle/>
+                    <a:p>
+                      <a:pPr>
+                        <a:lnSpc>
+                          <a:spcPct val="95000"/>
+                        </a:lnSpc>
+                      </a:pPr>
+                      <a:r>
+                        <a:rPr sz="1100" b="0">
+                          <a:solidFill>
+                            <a:srgbClr val="111827"/>
+                          </a:solidFill>
+                          <a:latin typeface="맑은 고딕"/>
+                        </a:rPr>
+                        <a:t>설정 &gt; 공유 저장소 &gt; 📊 구글 시트</a:t>
+                      </a:r>
+                    </a:p>
+                  </a:txBody>
+                  <a:tcPr marL="54864" marR="54864" marT="18288" marB="18288">
+                    <a:solidFill>
+                      <a:srgbClr val="F1F5F9"/>
+                    </a:solidFill>
+                  </a:tcPr>
+                </a:tc>
+                <a:tc>
+                  <a:txBody>
+                    <a:bodyPr/>
+                    <a:lstStyle/>
+                    <a:p>
+                      <a:pPr>
+                        <a:lnSpc>
+                          <a:spcPct val="95000"/>
+                        </a:lnSpc>
+                      </a:pPr>
+                      <a:r>
+                        <a:rPr sz="1100" b="0">
+                          <a:solidFill>
+                            <a:srgbClr val="111827"/>
+                          </a:solidFill>
+                          <a:latin typeface="맑은 고딕"/>
+                        </a:rPr>
+                        <a:t>구글 스프레드시트</a:t>
+                      </a:r>
+                    </a:p>
+                  </a:txBody>
+                  <a:tcPr marL="54864" marR="54864" marT="18288" marB="18288">
+                    <a:solidFill>
+                      <a:srgbClr val="F1F5F9"/>
+                    </a:solidFill>
+                  </a:tcPr>
+                </a:tc>
+                <a:tc>
+                  <a:txBody>
+                    <a:bodyPr/>
+                    <a:lstStyle/>
+                    <a:p>
+                      <a:pPr>
+                        <a:lnSpc>
+                          <a:spcPct val="95000"/>
+                        </a:lnSpc>
+                      </a:pPr>
+                      <a:r>
+                        <a:rPr sz="1100" b="1">
+                          <a:solidFill>
+                            <a:srgbClr val="111827"/>
+                          </a:solidFill>
+                          <a:latin typeface="맑은 고딕"/>
+                        </a:rPr>
+                        <a:t>떨어진 지역끼리 나눠 쌓을 때</a:t>
+                      </a:r>
+                      <a:r>
+                        <a:rPr sz="1100" b="0">
+                          <a:solidFill>
+                            <a:srgbClr val="111827"/>
+                          </a:solidFill>
+                          <a:latin typeface="맑은 고딕"/>
+                        </a:rPr>
+                        <a:t> (인터넷 필요)</a:t>
+                      </a:r>
+                    </a:p>
+                  </a:txBody>
+                  <a:tcPr marL="54864" marR="54864" marT="18288" marB="18288">
+                    <a:solidFill>
+                      <a:srgbClr val="F1F5F9"/>
+                    </a:solidFill>
+                  </a:tcPr>
+                </a:tc>
+              </a:tr>
             </a:tbl>
           </a:graphicData>
         </a:graphic>
@@ -28636,7 +28728,7 @@
         </p:nvSpPr>
         <p:spPr>
           <a:xfrm>
-            <a:off x="640080" y="2852928"/>
+            <a:off x="640080" y="3145536"/>
             <a:ext cx="10881360" cy="566928"/>
           </a:xfrm>
           <a:prstGeom prst="roundRect">
@@ -28684,7 +28776,7 @@
         </p:nvSpPr>
         <p:spPr>
           <a:xfrm>
-            <a:off x="822960" y="2852928"/>
+            <a:off x="822960" y="3145536"/>
             <a:ext cx="10515600" cy="566928"/>
           </a:xfrm>
           <a:prstGeom prst="rect">
@@ -28724,7 +28816,25 @@
                 </a:solidFill>
                 <a:latin typeface="맑은 고딕"/>
               </a:rPr>
-              <a:t>는 설정에서 공유 폴더(또는 서버)를 등록해 두세요. 프로그램을 켤 때마다 자동으로 서로의 데이터를 합칩니다.</a:t>
+              <a:t>는 설정에서 공유 폴더(또는 서버)를 등록해 두세요. 프로그램을 켤 때마다 자동으로 서로의 데이터를 합칩니다. 심양·비나처럼 </a:t>
+            </a:r>
+            <a:r>
+              <a:rPr sz="1250" b="1">
+                <a:solidFill>
+                  <a:srgbClr val="111827"/>
+                </a:solidFill>
+                <a:latin typeface="맑은 고딕"/>
+              </a:rPr>
+              <a:t>멀리 떨어진 곳끼리</a:t>
+            </a:r>
+            <a:r>
+              <a:rPr sz="1250" b="0">
+                <a:solidFill>
+                  <a:srgbClr val="111827"/>
+                </a:solidFill>
+                <a:latin typeface="맑은 고딕"/>
+              </a:rPr>
+              <a:t> 나눌 때만 구글 시트를 쓰며, 구글이 막힌 곳에서는 프로그램이 알아서 건너뜁니다.</a:t>
             </a:r>
           </a:p>
         </p:txBody>

--- a/PIE_가이드_한국어.pptx
+++ b/PIE_가이드_한국어.pptx
@@ -29442,7 +29442,7 @@
                           </a:solidFill>
                           <a:latin typeface="맑은 고딕"/>
                         </a:rPr>
-                        <a:t>PIE(중국).bat</a:t>
+                        <a:t>PIE 실행.bat</a:t>
                       </a:r>
                       <a:r>
                         <a:rPr sz="1100" b="0">
@@ -32549,7 +32549,7 @@
                 </a:solidFill>
                 <a:latin typeface="맑은 고딕"/>
               </a:rPr>
-              <a:t>PIE(중국).bat</a:t>
+              <a:t>PIE 실행.bat</a:t>
             </a:r>
             <a:r>
               <a:rPr sz="1300" b="0">
@@ -32829,7 +32829,7 @@
                 </a:solidFill>
                 <a:latin typeface="맑은 고딕"/>
               </a:rPr>
-              <a:t>PIE(중국).bat 더블클릭</a:t>
+              <a:t>PIE 실행.bat 더블클릭</a:t>
             </a:r>
           </a:p>
         </p:txBody>
@@ -33658,7 +33658,7 @@
                 </a:solidFill>
                 <a:latin typeface="맑은 고딕"/>
               </a:rPr>
-              <a:t>PIE(중국).bat</a:t>
+              <a:t>PIE 실행.bat</a:t>
             </a:r>
             <a:r>
               <a:rPr sz="1300" b="0">
